--- a/fixtures/pptx/synthetic/10-with-anim.pptx
+++ b/fixtures/pptx/synthetic/10-with-anim.pptx
@@ -945,6 +945,65 @@
   <p:clrMapOvr>
     <a:masterClrMapping/>
   </p:clrMapOvr>
+  <p:transition spd="med">
+    <p:fade/>
+  </p:transition>
+  <p:timing>
+    <p:tnLst>
+      <p:par>
+        <p:cTn id="1" dur="indefinite" restart="never" nodeType="tmRoot">
+          <p:childTnLst>
+            <p:seq concurrent="1" nextAc="seek">
+              <p:cTn id="2" dur="indefinite" nodeType="mainSeq">
+                <p:childTnLst>
+                  <p:par>
+                    <p:cTn id="3" presetID="1" presetClass="entr" presetSubtype="0" fill="hold" nodeType="clickEffect">
+                      <p:childTnLst>
+                        <p:set>
+                          <p:cBhvr>
+                            <p:cTn id="4" dur="1" fill="hold"/>
+                            <p:tgtEl>
+                              <p:spTgt spid="2"/>
+                            </p:tgtEl>
+                            <p:attrNameLst>
+                              <p:attrName>style.visibility</p:attrName>
+                            </p:attrNameLst>
+                          </p:cBhvr>
+                          <p:to>
+                            <p:strVal val="visible"/>
+                          </p:to>
+                        </p:set>
+                      </p:childTnLst>
+                    </p:cTn>
+                  </p:par>
+                  <p:par>
+                    <p:cTn id="5" presetID="2" presetClass="entr" presetSubtype="4" fill="hold" nodeType="afterEffect" dur="500">
+                      <p:childTnLst>
+                        <p:set>
+                          <p:cBhvr>
+                            <p:cTn id="6" dur="1" fill="hold"/>
+                            <p:tgtEl>
+                              <p:spTgt spid="3"/>
+                            </p:tgtEl>
+                            <p:attrNameLst>
+                              <p:attrName>style.visibility</p:attrName>
+                            </p:attrNameLst>
+                          </p:cBhvr>
+                          <p:to>
+                            <p:strVal val="visible"/>
+                          </p:to>
+                        </p:set>
+                      </p:childTnLst>
+                    </p:cTn>
+                  </p:par>
+                </p:childTnLst>
+              </p:cTn>
+            </p:seq>
+          </p:childTnLst>
+        </p:cTn>
+      </p:par>
+    </p:tnLst>
+  </p:timing>
 </p:sld>
 </file>
 
